--- a/Topic_E/Exam_Practice/TE-L05_Writing_Workshop_Faiths_Beliefs_and_Places_of_Worship.pptx
+++ b/Topic_E/Exam_Practice/TE-L05_Writing_Workshop_Faiths_Beliefs_and_Places_of_Worship.pptx
@@ -784,7 +784,11 @@
           <a:lstStyle/>
           <a:p>
             <a:r>
-              <a:rPr lang="en-US" dirty="0"/>
+              <a:rPr lang="ar-SA" dirty="0">
+                <a:latin typeface="Amiri" pitchFamily="2" charset="-78"/>
+                <a:ea typeface="Amiri" pitchFamily="2" charset="-78"/>
+                <a:cs typeface="Amiri" pitchFamily="2" charset="-78"/>
+              </a:rPr>
               <a:t>Q3 (3 min to choose and read). Title (أ) suits Core and Develop; title (ب) suits Stretch.</a:t>
             </a:r>
             <a:endParaRPr lang="en-US" dirty="0"/>
@@ -1403,7 +1407,11 @@
           <a:lstStyle/>
           <a:p>
             <a:r>
-              <a:rPr lang="en-US" dirty="0"/>
+              <a:rPr lang="ar-SA" dirty="0">
+                <a:latin typeface="Amiri" pitchFamily="2" charset="-78"/>
+                <a:ea typeface="Amiri" pitchFamily="2" charset="-78"/>
+                <a:cs typeface="Amiri" pitchFamily="2" charset="-78"/>
+              </a:rPr>
               <a:t>WELCOME (1 min) — while students join.
 • Greet each student by name as they arrive: السَّلَامُ عَلَيْكُمْ. Take the register (Pastoral Tracker: attendance 0/1).
 • 2-MINUTE CHECK-IN (SEND training): a private chat to any student who seemed unsettled last lesson — “Are you okay today? 👍 / 👎”.
@@ -1936,7 +1944,11 @@
           <a:lstStyle/>
           <a:p>
             <a:r>
-              <a:rPr lang="en-US" dirty="0"/>
+              <a:rPr lang="ar-SA" dirty="0">
+                <a:latin typeface="Amiri" pitchFamily="2" charset="-78"/>
+                <a:ea typeface="Amiri" pitchFamily="2" charset="-78"/>
+                <a:cs typeface="Amiri" pitchFamily="2" charset="-78"/>
+              </a:rPr>
               <a:t>Question words: أَيْنَ ذَهَبْتُمْ (where did you go — PAST) · صِفْ (describe!) · تَعَلَّمْتَ (you learnt) · سَتَزُورُونَ (you will visit — FUTURE).</a:t>
             </a:r>
             <a:endParaRPr lang="en-US" dirty="0"/>
@@ -2508,6 +2520,7 @@
                   <a:srgbClr val="D4AF37"/>
                 </a:solidFill>
                 <a:latin typeface="Amiri" pitchFamily="2" charset="-78"/>
+                <a:ea typeface="Amiri" pitchFamily="2" charset="-78"/>
                 <a:cs typeface="Amiri" pitchFamily="2" charset="-78"/>
               </a:rPr>
               <a:t>م</a:t>
@@ -2714,6 +2727,7 @@
                   <a:srgbClr val="D4AF37"/>
                 </a:solidFill>
                 <a:latin typeface="Amiri" pitchFamily="2" charset="-78"/>
+                <a:ea typeface="Amiri" pitchFamily="2" charset="-78"/>
                 <a:cs typeface="Amiri" pitchFamily="2" charset="-78"/>
               </a:rPr>
               <a:t>وَرْشَةُ الكِتَابَةِ — الأَدْيَانُ وَأَمَاكِنُ العِبَادَةِ</a:t>
@@ -3171,6 +3185,7 @@
                   <a:srgbClr val="D4AF37"/>
                 </a:solidFill>
                 <a:latin typeface="Amiri" pitchFamily="2" charset="-78"/>
+                <a:ea typeface="Amiri" pitchFamily="2" charset="-78"/>
                 <a:cs typeface="Amiri" pitchFamily="2" charset="-78"/>
               </a:rPr>
               <a:t>م</a:t>
@@ -3491,6 +3506,7 @@
                   <a:srgbClr val="8A6D1E"/>
                 </a:solidFill>
                 <a:latin typeface="Amiri" pitchFamily="2" charset="-78"/>
+                <a:ea typeface="Amiri" pitchFamily="2" charset="-78"/>
                 <a:cs typeface="Amiri" pitchFamily="2" charset="-78"/>
               </a:rPr>
               <a:t>نَمُوذَجُ الإِجَابَةِ</a:t>
@@ -3604,6 +3620,7 @@
                   <a:srgbClr val="1F2A37"/>
                 </a:solidFill>
                 <a:latin typeface="Amiri" pitchFamily="2" charset="-78"/>
+                <a:ea typeface="Amiri" pitchFamily="2" charset="-78"/>
                 <a:cs typeface="Amiri" pitchFamily="2" charset="-78"/>
               </a:rPr>
               <a:t>مَرْحَبًا يَا سَامِي،</a:t>
@@ -3623,6 +3640,7 @@
                   <a:srgbClr val="1F2A37"/>
                 </a:solidFill>
                 <a:latin typeface="Amiri" pitchFamily="2" charset="-78"/>
+                <a:ea typeface="Amiri" pitchFamily="2" charset="-78"/>
                 <a:cs typeface="Amiri" pitchFamily="2" charset="-78"/>
               </a:rPr>
               <a:t>كَيْفَ حَالُكَ؟ أَمْسِ زُرْنَا مَعَ المَدْرَسَةِ ثَلَاثَةَ أَمَاكِنَ لِلْعِبَادَةِ فِي مَدِينَتِنَا. أَوَّلًا، زُرْنَا الكَاتِدْرَائِيَّةَ الَّتِي فِي وَسَطِ المَدِينَةِ. هِيَ قَدِيمَةٌ جِدًّا، وَلَهَا نَوَافِذُ مُلَوَّنَةٌ جَمِيلَةٌ. ثُمَّ زُرْنَا مَعْبَدًا لِلسِّيخِ، وَهُنَاكَ غَطَّيْنَا رُؤُوسَنَا وَأَكَلْنَا طَعَامًا مَجَّانِيًّا مَعَ النَّاسِ. أَخِيرًا، زُرْنَا مَسْجِدَنَا، وَشَرَحْتُ لِزُمَلَائِي كَيْفَ يُصَلِّي المُسْلِمُونَ. تَعَلَّمْتُ أَنَّ كُلَّ الأَمَاكِنِ تُرَحِّبُ بِالزُّوَّارِ. أَظُنُّ أَنَّ الزِّيَارَةَ كَانَتْ مُفِيدَةً جِدًّا، لِأَنَّنَا فَهِمْنَا جِيرَانَنَا أَكْثَرَ. فِي الشَّهْرِ القَادِمِ سَنَزُورُ كَنِيسًا. وَأَنْتَ، هَلْ زُرْتَ مَكَانًا مِثْلَهُ؟</a:t>
@@ -3642,6 +3660,7 @@
                   <a:srgbClr val="1F2A37"/>
                 </a:solidFill>
                 <a:latin typeface="Amiri" pitchFamily="2" charset="-78"/>
+                <a:ea typeface="Amiri" pitchFamily="2" charset="-78"/>
                 <a:cs typeface="Amiri" pitchFamily="2" charset="-78"/>
               </a:rPr>
               <a:t>مَعَ السَّلَامَةِ،</a:t>
@@ -3661,6 +3680,7 @@
                   <a:srgbClr val="1F2A37"/>
                 </a:solidFill>
                 <a:latin typeface="Amiri" pitchFamily="2" charset="-78"/>
+                <a:ea typeface="Amiri" pitchFamily="2" charset="-78"/>
                 <a:cs typeface="Amiri" pitchFamily="2" charset="-78"/>
               </a:rPr>
               <a:t>يُوسُفُ</a:t>
@@ -3824,11 +3844,12 @@
               <a:buNone/>
             </a:pPr>
             <a:r>
-              <a:rPr lang="en-US" sz="950" b="1" dirty="0">
+              <a:rPr lang="ar-SA" sz="950" b="1" dirty="0">
                 <a:solidFill>
                   <a:srgbClr val="FFFFFF"/>
                 </a:solidFill>
                 <a:latin typeface="Calibri" pitchFamily="34" charset="0"/>
+                <a:ea typeface="Amiri" pitchFamily="2" charset="-78"/>
                 <a:cs typeface="Amiri" pitchFamily="2" charset="-78"/>
               </a:rPr>
               <a:t>الَّتِي فِي وَسَطِ المَدِينَةِ</a:t>
@@ -3889,11 +3910,12 @@
               <a:buNone/>
             </a:pPr>
             <a:r>
-              <a:rPr lang="en-US" sz="950" b="1" dirty="0">
+              <a:rPr lang="ar-SA" sz="950" b="1" dirty="0">
                 <a:solidFill>
                   <a:srgbClr val="FFFFFF"/>
                 </a:solidFill>
                 <a:latin typeface="Calibri" pitchFamily="34" charset="0"/>
+                <a:ea typeface="Amiri" pitchFamily="2" charset="-78"/>
                 <a:cs typeface="Amiri" pitchFamily="2" charset="-78"/>
               </a:rPr>
               <a:t>وَلَهَا نَوَافِذُ</a:t>
@@ -3954,11 +3976,12 @@
               <a:buNone/>
             </a:pPr>
             <a:r>
-              <a:rPr lang="en-US" sz="950" b="1" dirty="0">
+              <a:rPr lang="ar-SA" sz="950" b="1" dirty="0">
                 <a:solidFill>
                   <a:srgbClr val="FFFFFF"/>
                 </a:solidFill>
                 <a:latin typeface="Calibri" pitchFamily="34" charset="0"/>
+                <a:ea typeface="Amiri" pitchFamily="2" charset="-78"/>
                 <a:cs typeface="Amiri" pitchFamily="2" charset="-78"/>
               </a:rPr>
               <a:t>تَعَلَّمْتُ أَنَّ</a:t>
@@ -4019,11 +4042,12 @@
               <a:buNone/>
             </a:pPr>
             <a:r>
-              <a:rPr lang="en-US" sz="950" b="1" dirty="0">
+              <a:rPr lang="ar-SA" sz="950" b="1" dirty="0">
                 <a:solidFill>
                   <a:srgbClr val="FFFFFF"/>
                 </a:solidFill>
                 <a:latin typeface="Calibri" pitchFamily="34" charset="0"/>
+                <a:ea typeface="Amiri" pitchFamily="2" charset="-78"/>
                 <a:cs typeface="Amiri" pitchFamily="2" charset="-78"/>
               </a:rPr>
               <a:t>سَنَزُورُ كَنِيسًا</a:t>
@@ -4157,6 +4181,7 @@
                   <a:srgbClr val="D4AF37"/>
                 </a:solidFill>
                 <a:latin typeface="Amiri" pitchFamily="2" charset="-78"/>
+                <a:ea typeface="Amiri" pitchFamily="2" charset="-78"/>
                 <a:cs typeface="Amiri" pitchFamily="2" charset="-78"/>
               </a:rPr>
               <a:t>م</a:t>
@@ -4477,6 +4502,7 @@
                   <a:srgbClr val="8A6D1E"/>
                 </a:solidFill>
                 <a:latin typeface="Amiri" pitchFamily="2" charset="-78"/>
+                <a:ea typeface="Amiri" pitchFamily="2" charset="-78"/>
                 <a:cs typeface="Amiri" pitchFamily="2" charset="-78"/>
               </a:rPr>
               <a:t>نَمُوذَجُ الإِجَابَةِ</a:t>
@@ -4590,6 +4616,7 @@
                   <a:srgbClr val="1F2A37"/>
                 </a:solidFill>
                 <a:latin typeface="Amiri" pitchFamily="2" charset="-78"/>
+                <a:ea typeface="Amiri" pitchFamily="2" charset="-78"/>
                 <a:cs typeface="Amiri" pitchFamily="2" charset="-78"/>
               </a:rPr>
               <a:t>عَزِيزِي سَامِي،</a:t>
@@ -4609,6 +4636,7 @@
                   <a:srgbClr val="1F2A37"/>
                 </a:solidFill>
                 <a:latin typeface="Amiri" pitchFamily="2" charset="-78"/>
+                <a:ea typeface="Amiri" pitchFamily="2" charset="-78"/>
                 <a:cs typeface="Amiri" pitchFamily="2" charset="-78"/>
               </a:rPr>
               <a:t>عُدْتُ أَمْسِ مِنْ رِحْلَةٍ مَدْرَسِيَّةٍ لَنْ أَنْسَاهَا؛ فَقَدْ زُرْنَا ثَلَاثَةَ أَمَاكِنَ لِلْعِبَادَةِ فِي يَوْمٍ وَاحِدٍ. بَدَأْنَا بِالكَاتِدْرَائِيَّةِ الَّتِي يَزِيدُ عُمْرُهَا عَلَى ثَمَانِمِئَةِ سَنَةٍ، وَأَدْهَشَتْنِي نَوَافِذُهَا المُلَوَّنَةُ الَّتِي تَحْكِي قِصَصَ الأَنْبِيَاءِ. ثُمَّ انْتَقَلْنَا إِلَى مَعْبَدِ السِّيخِ، حَيْثُ يَأْكُلُ الزُّوَّارُ مِنْ كُلِّ الأَدْيَانِ طَعَامًا مَجَّانِيًّا جَالِسِينَ عَلَى الأَرْضِ جَنْبًا إِلَى جَنْبٍ. وَخَتَمْنَا بِمَسْجِدِنَا، فَشَرَحْتُ لِزُمَلَائِي مَعْنَى الأَذَانِ. وَأَكْثَرُ مَا أَثَّرَ فِيَّ أَنَّ كُلَّ مَكَانٍ يُعَبِّرُ عَنِ الإِيمَانِ بِطَرِيقَتِهِ، غَيْرَ أَنَّ الكَرَمَ وَالهُدُوءَ يَجْمَعُ بَيْنَهَا. وَإِذَا سَمَحَ المُعَلِّمُ، فَسَنَزُورُ كَنِيسًا الشَّهْرَ القَادِمَ. هَلْ تُحِبُّ أَنْ تَنْضَمَّ إِلَيْنَا؟</a:t>
@@ -4628,6 +4656,7 @@
                   <a:srgbClr val="1F2A37"/>
                 </a:solidFill>
                 <a:latin typeface="Amiri" pitchFamily="2" charset="-78"/>
+                <a:ea typeface="Amiri" pitchFamily="2" charset="-78"/>
                 <a:cs typeface="Amiri" pitchFamily="2" charset="-78"/>
               </a:rPr>
               <a:t>مَعَ تَحِيَّاتِي،</a:t>
@@ -4647,6 +4676,7 @@
                   <a:srgbClr val="1F2A37"/>
                 </a:solidFill>
                 <a:latin typeface="Amiri" pitchFamily="2" charset="-78"/>
+                <a:ea typeface="Amiri" pitchFamily="2" charset="-78"/>
                 <a:cs typeface="Amiri" pitchFamily="2" charset="-78"/>
               </a:rPr>
               <a:t>يُوسُفُ</a:t>
@@ -4810,11 +4840,12 @@
               <a:buNone/>
             </a:pPr>
             <a:r>
-              <a:rPr lang="en-US" sz="950" b="1" dirty="0">
+              <a:rPr lang="ar-SA" sz="950" b="1" dirty="0">
                 <a:solidFill>
                   <a:srgbClr val="FFFFFF"/>
                 </a:solidFill>
                 <a:latin typeface="Calibri" pitchFamily="34" charset="0"/>
+                <a:ea typeface="Amiri" pitchFamily="2" charset="-78"/>
                 <a:cs typeface="Amiri" pitchFamily="2" charset="-78"/>
               </a:rPr>
               <a:t>لَنْ أَنْسَاهَا</a:t>
@@ -4875,11 +4906,12 @@
               <a:buNone/>
             </a:pPr>
             <a:r>
-              <a:rPr lang="en-US" sz="950" b="1" dirty="0">
+              <a:rPr lang="ar-SA" sz="950" b="1" dirty="0">
                 <a:solidFill>
                   <a:srgbClr val="FFFFFF"/>
                 </a:solidFill>
                 <a:latin typeface="Calibri" pitchFamily="34" charset="0"/>
+                <a:ea typeface="Amiri" pitchFamily="2" charset="-78"/>
                 <a:cs typeface="Amiri" pitchFamily="2" charset="-78"/>
               </a:rPr>
               <a:t>يَزِيدُ عُمْرُهَا عَلَى</a:t>
@@ -4940,11 +4972,12 @@
               <a:buNone/>
             </a:pPr>
             <a:r>
-              <a:rPr lang="en-US" sz="950" b="1" dirty="0">
+              <a:rPr lang="ar-SA" sz="950" b="1" dirty="0">
                 <a:solidFill>
                   <a:srgbClr val="FFFFFF"/>
                 </a:solidFill>
                 <a:latin typeface="Calibri" pitchFamily="34" charset="0"/>
+                <a:ea typeface="Amiri" pitchFamily="2" charset="-78"/>
                 <a:cs typeface="Amiri" pitchFamily="2" charset="-78"/>
               </a:rPr>
               <a:t>جَالِسِينَ … جَنْبًا إِلَى جَنْبٍ</a:t>
@@ -5005,11 +5038,12 @@
               <a:buNone/>
             </a:pPr>
             <a:r>
-              <a:rPr lang="en-US" sz="950" b="1" dirty="0">
+              <a:rPr lang="ar-SA" sz="950" b="1" dirty="0">
                 <a:solidFill>
                   <a:srgbClr val="FFFFFF"/>
                 </a:solidFill>
                 <a:latin typeface="Calibri" pitchFamily="34" charset="0"/>
+                <a:ea typeface="Amiri" pitchFamily="2" charset="-78"/>
                 <a:cs typeface="Amiri" pitchFamily="2" charset="-78"/>
               </a:rPr>
               <a:t>إِذَا سَمَحَ … فَسَنَزُورُ</a:t>
@@ -5143,6 +5177,7 @@
                   <a:srgbClr val="D4AF37"/>
                 </a:solidFill>
                 <a:latin typeface="Amiri" pitchFamily="2" charset="-78"/>
+                <a:ea typeface="Amiri" pitchFamily="2" charset="-78"/>
                 <a:cs typeface="Amiri" pitchFamily="2" charset="-78"/>
               </a:rPr>
               <a:t>م</a:t>
@@ -5463,6 +5498,7 @@
                   <a:srgbClr val="8A6D1E"/>
                 </a:solidFill>
                 <a:latin typeface="Amiri" pitchFamily="2" charset="-78"/>
+                <a:ea typeface="Amiri" pitchFamily="2" charset="-78"/>
                 <a:cs typeface="Amiri" pitchFamily="2" charset="-78"/>
               </a:rPr>
               <a:t>اخْتَرْ عُنْوَانًا وَاحِدًا</a:t>
@@ -5743,6 +5779,7 @@
                   <a:srgbClr val="1B3B6F"/>
                 </a:solidFill>
                 <a:latin typeface="Amiri" pitchFamily="2" charset="-78"/>
+                <a:ea typeface="Amiri" pitchFamily="2" charset="-78"/>
                 <a:cs typeface="Amiri" pitchFamily="2" charset="-78"/>
               </a:rPr>
               <a:t>مَكَانٌ لِلْعِبَادَةِ فِي حَيِّي</a:t>
@@ -5781,6 +5818,7 @@
                   <a:srgbClr val="1B3B6F"/>
                 </a:solidFill>
                 <a:latin typeface="Amiri" pitchFamily="2" charset="-78"/>
+                <a:ea typeface="Amiri" pitchFamily="2" charset="-78"/>
                 <a:cs typeface="Amiri" pitchFamily="2" charset="-78"/>
               </a:rPr>
               <a:t>(أ)</a:t>
@@ -5887,6 +5925,7 @@
                   <a:srgbClr val="1B3B6F"/>
                 </a:solidFill>
                 <a:latin typeface="Amiri" pitchFamily="2" charset="-78"/>
+                <a:ea typeface="Amiri" pitchFamily="2" charset="-78"/>
                 <a:cs typeface="Amiri" pitchFamily="2" charset="-78"/>
               </a:rPr>
               <a:t>مَدِينَتُكَ وَأَدْيَانُ سُكَّانِهَا · وَصْفُ المَكَانِ وَمَوْقِعُهُ · مَاذَا يَحْدُثُ هُنَاكَ (مَعَ مِثَالٍ) · الاحْتِرَامُ بَيْنَ الجِيرَانِ وَخُطَطُكَ</a:t>
@@ -6018,6 +6057,7 @@
                   <a:srgbClr val="1B3B6F"/>
                 </a:solidFill>
                 <a:latin typeface="Amiri" pitchFamily="2" charset="-78"/>
+                <a:ea typeface="Amiri" pitchFamily="2" charset="-78"/>
                 <a:cs typeface="Amiri" pitchFamily="2" charset="-78"/>
               </a:rPr>
               <a:t>كَيْفَ نَبْنِي الاحْتِرَامَ بَيْنَ أَتْبَاعِ الأَدْيَانِ؟</a:t>
@@ -6056,6 +6096,7 @@
                   <a:srgbClr val="1B3B6F"/>
                 </a:solidFill>
                 <a:latin typeface="Amiri" pitchFamily="2" charset="-78"/>
+                <a:ea typeface="Amiri" pitchFamily="2" charset="-78"/>
                 <a:cs typeface="Amiri" pitchFamily="2" charset="-78"/>
               </a:rPr>
               <a:t>(ب)</a:t>
@@ -6159,6 +6200,7 @@
                   <a:srgbClr val="1B3B6F"/>
                 </a:solidFill>
                 <a:latin typeface="Amiri" pitchFamily="2" charset="-78"/>
+                <a:ea typeface="Amiri" pitchFamily="2" charset="-78"/>
                 <a:cs typeface="Amiri" pitchFamily="2" charset="-78"/>
               </a:rPr>
               <a:t>المَوْضُوعُ · دَوْرُ المَعْرِفَةِ · مِثَالٌ مِنْ تَجْرِبَتِكَ · رَأْيُكَ</a:t>
@@ -6358,6 +6400,7 @@
                   <a:srgbClr val="D4AF37"/>
                 </a:solidFill>
                 <a:latin typeface="Amiri" pitchFamily="2" charset="-78"/>
+                <a:ea typeface="Amiri" pitchFamily="2" charset="-78"/>
                 <a:cs typeface="Amiri" pitchFamily="2" charset="-78"/>
               </a:rPr>
               <a:t>م</a:t>
@@ -6678,6 +6721,7 @@
                   <a:srgbClr val="8A6D1E"/>
                 </a:solidFill>
                 <a:latin typeface="Amiri" pitchFamily="2" charset="-78"/>
+                <a:ea typeface="Amiri" pitchFamily="2" charset="-78"/>
                 <a:cs typeface="Amiri" pitchFamily="2" charset="-78"/>
               </a:rPr>
               <a:t>خُطَّةُ الكِتَابَةِ</a:t>
@@ -7302,6 +7346,7 @@
                   <a:srgbClr val="1B3B6F"/>
                 </a:solidFill>
                 <a:latin typeface="Amiri" pitchFamily="2" charset="-78"/>
+                <a:ea typeface="Amiri" pitchFamily="2" charset="-78"/>
                 <a:cs typeface="Amiri" pitchFamily="2" charset="-78"/>
               </a:rPr>
               <a:t>فِي حَيِّي مَسْجِدٌ كَبِيرٌ أَمَامَ الحَدِيقَةِ.</a:t>
@@ -7401,6 +7446,7 @@
                   <a:srgbClr val="1B3B6F"/>
                 </a:solidFill>
                 <a:latin typeface="Amiri" pitchFamily="2" charset="-78"/>
+                <a:ea typeface="Amiri" pitchFamily="2" charset="-78"/>
                 <a:cs typeface="Amiri" pitchFamily="2" charset="-78"/>
               </a:rPr>
               <a:t>النَّاسُ الَّذِينَ يُصَلُّونَ فِيهَا طَيِّبُونَ.</a:t>
@@ -7500,6 +7546,7 @@
                   <a:srgbClr val="1B3B6F"/>
                 </a:solidFill>
                 <a:latin typeface="Amiri" pitchFamily="2" charset="-78"/>
+                <a:ea typeface="Amiri" pitchFamily="2" charset="-78"/>
                 <a:cs typeface="Amiri" pitchFamily="2" charset="-78"/>
               </a:rPr>
               <a:t>سَأَزُورُ الكَنِيسَةَ مَعَ صَدِيقِي.</a:t>
@@ -7661,6 +7708,7 @@
                   <a:srgbClr val="1F2A37"/>
                 </a:solidFill>
                 <a:latin typeface="Amiri" pitchFamily="2" charset="-78"/>
+                <a:ea typeface="Amiri" pitchFamily="2" charset="-78"/>
                 <a:cs typeface="Amiri" pitchFamily="2" charset="-78"/>
               </a:rPr>
               <a:t>أ</a:t>
@@ -7687,6 +7735,7 @@
                   <a:srgbClr val="1F2A37"/>
                 </a:solidFill>
                 <a:latin typeface="Amiri" pitchFamily="2" charset="-78"/>
+                <a:ea typeface="Amiri" pitchFamily="2" charset="-78"/>
                 <a:cs typeface="Amiri" pitchFamily="2" charset="-78"/>
               </a:rPr>
               <a:t>ب</a:t>
@@ -7833,6 +7882,7 @@
                   <a:srgbClr val="D4AF37"/>
                 </a:solidFill>
                 <a:latin typeface="Amiri" pitchFamily="2" charset="-78"/>
+                <a:ea typeface="Amiri" pitchFamily="2" charset="-78"/>
                 <a:cs typeface="Amiri" pitchFamily="2" charset="-78"/>
               </a:rPr>
               <a:t>م</a:t>
@@ -8090,6 +8140,7 @@
                   <a:srgbClr val="8A6D1E"/>
                 </a:solidFill>
                 <a:latin typeface="Amiri" pitchFamily="2" charset="-78"/>
+                <a:ea typeface="Amiri" pitchFamily="2" charset="-78"/>
                 <a:cs typeface="Amiri" pitchFamily="2" charset="-78"/>
               </a:rPr>
               <a:t>أ</a:t>
@@ -8154,6 +8205,7 @@
                   <a:srgbClr val="1B3B6F"/>
                 </a:solidFill>
                 <a:latin typeface="Amiri" pitchFamily="2" charset="-78"/>
+                <a:ea typeface="Amiri" pitchFamily="2" charset="-78"/>
                 <a:cs typeface="Amiri" pitchFamily="2" charset="-78"/>
               </a:rPr>
               <a:t>أ</a:t>
@@ -8205,6 +8257,7 @@
                   <a:srgbClr val="8A6D1E"/>
                 </a:solidFill>
                 <a:latin typeface="Amiri" pitchFamily="2" charset="-78"/>
+                <a:ea typeface="Amiri" pitchFamily="2" charset="-78"/>
                 <a:cs typeface="Amiri" pitchFamily="2" charset="-78"/>
               </a:rPr>
               <a:t>نَمُوذَجُ الإِجَابَةِ</a:t>
@@ -8318,6 +8371,7 @@
                   <a:srgbClr val="1F2A37"/>
                 </a:solidFill>
                 <a:latin typeface="Amiri" pitchFamily="2" charset="-78"/>
+                <a:ea typeface="Amiri" pitchFamily="2" charset="-78"/>
                 <a:cs typeface="Amiri" pitchFamily="2" charset="-78"/>
               </a:rPr>
               <a:t>أَسْكُنُ فِي مَدِينَةِ لِيسْتَرَ فِي وَسَطِ إِنْجِلْتِرَا. هِيَ مَدِينَةٌ مُتَنَوِّعَةٌ، وَفِيهَا أَتْبَاعُ أَدْيَانٍ كَثِيرَةٍ: مُسْلِمُونَ وَمَسِيحِيُّونَ وَهِنْدُوسٌ وَسِيخٌ وَيَهُودٌ.</a:t>
@@ -8337,6 +8391,7 @@
                   <a:srgbClr val="1F2A37"/>
                 </a:solidFill>
                 <a:latin typeface="Amiri" pitchFamily="2" charset="-78"/>
+                <a:ea typeface="Amiri" pitchFamily="2" charset="-78"/>
                 <a:cs typeface="Amiri" pitchFamily="2" charset="-78"/>
               </a:rPr>
               <a:t>فِي حَيِّي مَسْجِدٌ كَبِيرٌ اسْمُهُ مَسْجِدُ النُّورِ. يَقَعُ المَسْجِدُ أَمَامَ الحَدِيقَةِ، بِجَانِبِ مَكْتَبَةِ الحَيِّ. لَهُ مِئْذَنَةٌ عَالِيَةٌ وَقُبَّةٌ خَضْرَاءُ. دَاخِلَ المَسْجِدِ قَاعَةٌ وَاسِعَةٌ لِلصَّلَاةِ، وَمَكْتَبَةٌ، وَصُفُوفٌ لِتَعْلِيمِ العَرَبِيَّةِ وَالقُرْآنِ لِلْأَطْفَالِ.</a:t>
@@ -8356,6 +8411,7 @@
                   <a:srgbClr val="1F2A37"/>
                 </a:solidFill>
                 <a:latin typeface="Amiri" pitchFamily="2" charset="-78"/>
+                <a:ea typeface="Amiri" pitchFamily="2" charset="-78"/>
                 <a:cs typeface="Amiri" pitchFamily="2" charset="-78"/>
               </a:rPr>
               <a:t>أَذْهَبُ إِلَى المَسْجِدِ كُلَّ يَوْمِ جُمُعَةٍ مَعَ أَبِي. المَسْجِدُ لَيْسَ لِلصَّلَاةِ فَقَطْ؛ مَثَلًا، فِيهِ بَنْكٌ لِلطَّعَامِ يُسَاعِدُ العَائِلَاتِ الَّتِي تَحْتَاجُ إِلَى مُسَاعَدَةٍ. فِي السَّنَةِ المَاضِيَةِ تَطَوَّعْتُ هُنَاكَ كُلَّ يَوْمِ سَبْتٍ، وَكُنْتُ أُرَتِّبُ الطَّعَامَ فِي الصَّنَادِيقِ.</a:t>
@@ -8375,6 +8431,7 @@
                   <a:srgbClr val="1F2A37"/>
                 </a:solidFill>
                 <a:latin typeface="Amiri" pitchFamily="2" charset="-78"/>
+                <a:ea typeface="Amiri" pitchFamily="2" charset="-78"/>
                 <a:cs typeface="Amiri" pitchFamily="2" charset="-78"/>
               </a:rPr>
               <a:t>مُقَابِلَ المَسْجِدِ كَنِيسَةٌ قَدِيمَةٌ، وَالنَّاسُ الَّذِينَ يُصَلُّونَ فِيهَا جِيرَانٌ طَيِّبُونَ. أَحْتَرِمُ كُلَّ الأَدْيَانِ، لِأَنَّ الاحْتِرَامَ مُهِمٌّ فِي مَدِينَةٍ مِثْلِ مَدِينَتِي. فِي المُسْتَقْبَلِ سَأَزُورُ الكَنِيسَةَ مَعَ صَدِيقِي جَيْمْسَ، وَهُوَ سَيَزُورُ مَسْجِدَنَا أَيْضًا.</a:t>
@@ -8538,11 +8595,12 @@
               <a:buNone/>
             </a:pPr>
             <a:r>
-              <a:rPr lang="en-US" sz="950" b="1" dirty="0">
+              <a:rPr lang="ar-SA" sz="950" b="1" dirty="0">
                 <a:solidFill>
                   <a:srgbClr val="FFFFFF"/>
                 </a:solidFill>
                 <a:latin typeface="Calibri" pitchFamily="34" charset="0"/>
+                <a:ea typeface="Amiri" pitchFamily="2" charset="-78"/>
                 <a:cs typeface="Amiri" pitchFamily="2" charset="-78"/>
               </a:rPr>
               <a:t>فِي حَيِّي مَسْجِدٌ</a:t>
@@ -8603,11 +8661,12 @@
               <a:buNone/>
             </a:pPr>
             <a:r>
-              <a:rPr lang="en-US" sz="950" b="1" dirty="0">
+              <a:rPr lang="ar-SA" sz="950" b="1" dirty="0">
                 <a:solidFill>
                   <a:srgbClr val="FFFFFF"/>
                 </a:solidFill>
                 <a:latin typeface="Calibri" pitchFamily="34" charset="0"/>
+                <a:ea typeface="Amiri" pitchFamily="2" charset="-78"/>
                 <a:cs typeface="Amiri" pitchFamily="2" charset="-78"/>
               </a:rPr>
               <a:t>أَمَامَ الحَدِيقَةِ، بِجَانِبِ</a:t>
@@ -8668,11 +8727,12 @@
               <a:buNone/>
             </a:pPr>
             <a:r>
-              <a:rPr lang="en-US" sz="950" b="1" dirty="0">
+              <a:rPr lang="ar-SA" sz="950" b="1" dirty="0">
                 <a:solidFill>
                   <a:srgbClr val="FFFFFF"/>
                 </a:solidFill>
                 <a:latin typeface="Calibri" pitchFamily="34" charset="0"/>
+                <a:ea typeface="Amiri" pitchFamily="2" charset="-78"/>
                 <a:cs typeface="Amiri" pitchFamily="2" charset="-78"/>
               </a:rPr>
               <a:t>الَّتِي تَحْتَاجُ</a:t>
@@ -8733,11 +8793,12 @@
               <a:buNone/>
             </a:pPr>
             <a:r>
-              <a:rPr lang="en-US" sz="950" b="1" dirty="0">
+              <a:rPr lang="ar-SA" sz="950" b="1" dirty="0">
                 <a:solidFill>
                   <a:srgbClr val="FFFFFF"/>
                 </a:solidFill>
                 <a:latin typeface="Calibri" pitchFamily="34" charset="0"/>
+                <a:ea typeface="Amiri" pitchFamily="2" charset="-78"/>
                 <a:cs typeface="Amiri" pitchFamily="2" charset="-78"/>
               </a:rPr>
               <a:t>النَّاسُ الَّذِينَ</a:t>
@@ -8871,6 +8932,7 @@
                   <a:srgbClr val="D4AF37"/>
                 </a:solidFill>
                 <a:latin typeface="Amiri" pitchFamily="2" charset="-78"/>
+                <a:ea typeface="Amiri" pitchFamily="2" charset="-78"/>
                 <a:cs typeface="Amiri" pitchFamily="2" charset="-78"/>
               </a:rPr>
               <a:t>م</a:t>
@@ -9128,6 +9190,7 @@
                   <a:srgbClr val="8A6D1E"/>
                 </a:solidFill>
                 <a:latin typeface="Amiri" pitchFamily="2" charset="-78"/>
+                <a:ea typeface="Amiri" pitchFamily="2" charset="-78"/>
                 <a:cs typeface="Amiri" pitchFamily="2" charset="-78"/>
               </a:rPr>
               <a:t>أ</a:t>
@@ -9192,6 +9255,7 @@
                   <a:srgbClr val="1B3B6F"/>
                 </a:solidFill>
                 <a:latin typeface="Amiri" pitchFamily="2" charset="-78"/>
+                <a:ea typeface="Amiri" pitchFamily="2" charset="-78"/>
                 <a:cs typeface="Amiri" pitchFamily="2" charset="-78"/>
               </a:rPr>
               <a:t>أ</a:t>
@@ -9243,6 +9307,7 @@
                   <a:srgbClr val="8A6D1E"/>
                 </a:solidFill>
                 <a:latin typeface="Amiri" pitchFamily="2" charset="-78"/>
+                <a:ea typeface="Amiri" pitchFamily="2" charset="-78"/>
                 <a:cs typeface="Amiri" pitchFamily="2" charset="-78"/>
               </a:rPr>
               <a:t>نَمُوذَجُ الإِجَابَةِ</a:t>
@@ -9356,6 +9421,7 @@
                   <a:srgbClr val="1F2A37"/>
                 </a:solidFill>
                 <a:latin typeface="Amiri" pitchFamily="2" charset="-78"/>
+                <a:ea typeface="Amiri" pitchFamily="2" charset="-78"/>
                 <a:cs typeface="Amiri" pitchFamily="2" charset="-78"/>
               </a:rPr>
               <a:t>حِينَ أَخْرُجُ مِنْ بَيْتِي فِي لِيسْتَرَ، أَسْمَعُ الأَذَانَ مِنْ مَسْجِدِ النُّورِ، وَبَعْدَ دَقَائِقَ تَرِنُّ أَجْرَاسُ الكَنِيسَةِ القَدِيمَةِ الَّتِي تَقَعُ مُقَابِلَهُ. هٰذَا هُوَ الصَّوْتُ الَّذِي نَشَأْتُ عَلَيْهِ، وَالَّذِي يُشْعِرُنِي بِأَنَّنِي فِي بَيْتِي.</a:t>
@@ -9375,6 +9441,7 @@
                   <a:srgbClr val="1F2A37"/>
                 </a:solidFill>
                 <a:latin typeface="Amiri" pitchFamily="2" charset="-78"/>
+                <a:ea typeface="Amiri" pitchFamily="2" charset="-78"/>
                 <a:cs typeface="Amiri" pitchFamily="2" charset="-78"/>
               </a:rPr>
               <a:t>وَمَسْجِدُ النُّورِ لَيْسَ مُجَرَّدَ بِنَاءٍ جَمِيلٍ بِمِئْذَنَةٍ عَالِيَةٍ وَقُبَّةٍ خَضْرَاءَ، بَلْ هُوَ قَلْبُ الحَيِّ؛ فَفِيهِ صُفُوفٌ لِلْأَطْفَالِ، وَعِيَادَةٌ مَجَّانِيَّةٌ مَرَّةً فِي الشَّهْرِ، وَبَنْكٌ لِلطَّعَامِ يَخْدُمُ النَّاسَ مِنْ كُلِّ الأَدْيَانِ دُونَ أَنْ يَسْأَلَهُمْ عَنْ دِينِهِمْ أَوْ أَصْلِهِمْ.</a:t>
@@ -9394,6 +9461,7 @@
                   <a:srgbClr val="1F2A37"/>
                 </a:solidFill>
                 <a:latin typeface="Amiri" pitchFamily="2" charset="-78"/>
+                <a:ea typeface="Amiri" pitchFamily="2" charset="-78"/>
                 <a:cs typeface="Amiri" pitchFamily="2" charset="-78"/>
               </a:rPr>
               <a:t>وَقَدْ تَطَوَّعْتُ فِي هٰذَا البَنْكِ عَامًا كَامِلًا، فَتَعَرَّفْتُ عَلَى جَارَتِنَا العَجُوزِ مَارِي، وَهِيَ مَسِيحِيَّةٌ تَأْتِي كُلَّ أُسْبُوعٍ لِتُسَاعِدَ فِي تَوْزِيعِ الطَّعَامِ. وَمِنْهَا تَعَلَّمْتُ أَنَّ الإِيمَانَ الحَقِيقِيَّ يَظْهَرُ فِي الأَفْعَالِ أَكْثَرَ مِنَ الكَلِمَاتِ، وَفِي الابْتِسَامَةِ أَكْثَرَ مِنَ الخُطَبِ.</a:t>
@@ -9413,6 +9481,7 @@
                   <a:srgbClr val="1F2A37"/>
                 </a:solidFill>
                 <a:latin typeface="Amiri" pitchFamily="2" charset="-78"/>
+                <a:ea typeface="Amiri" pitchFamily="2" charset="-78"/>
                 <a:cs typeface="Amiri" pitchFamily="2" charset="-78"/>
               </a:rPr>
               <a:t>صَحِيحٌ أَنَّ لِكُلِّ دِينٍ مُعْتَقَدَاتِهِ وَطُقُوسَهُ، غَيْرَ أَنَّ الاحْتِرَامَ المُتَبَادَلَ يَجْعَلُ حَيَّنَا مَكَانًا آمِنًا وَدَافِئًا لِلْجَمِيعِ. وَلَوْ سَأَلَنِي زَائِرٌ عَنْ سِرِّ هٰذَا الحَيِّ، لَقُلْتُ لَهُ: "اسْتَمِعْ إِلَى الأَذَانِ وَالأَجْرَاسِ مَعًا".</a:t>
@@ -9511,11 +9580,12 @@
               <a:buNone/>
             </a:pPr>
             <a:r>
-              <a:rPr lang="en-US" sz="950" b="1" dirty="0">
+              <a:rPr lang="ar-SA" sz="950" b="1" dirty="0">
                 <a:solidFill>
                   <a:srgbClr val="FFFFFF"/>
                 </a:solidFill>
                 <a:latin typeface="Calibri" pitchFamily="34" charset="0"/>
+                <a:ea typeface="Amiri" pitchFamily="2" charset="-78"/>
                 <a:cs typeface="Amiri" pitchFamily="2" charset="-78"/>
               </a:rPr>
               <a:t>الَّتِي تَقَعُ مُقَابِلَهُ</a:t>
@@ -9576,11 +9646,12 @@
               <a:buNone/>
             </a:pPr>
             <a:r>
-              <a:rPr lang="en-US" sz="950" b="1" dirty="0">
+              <a:rPr lang="ar-SA" sz="950" b="1" dirty="0">
                 <a:solidFill>
                   <a:srgbClr val="FFFFFF"/>
                 </a:solidFill>
                 <a:latin typeface="Calibri" pitchFamily="34" charset="0"/>
+                <a:ea typeface="Amiri" pitchFamily="2" charset="-78"/>
                 <a:cs typeface="Amiri" pitchFamily="2" charset="-78"/>
               </a:rPr>
               <a:t>لَيْسَ مُجَرَّدَ … بَلْ</a:t>
@@ -9641,11 +9712,12 @@
               <a:buNone/>
             </a:pPr>
             <a:r>
-              <a:rPr lang="en-US" sz="950" b="1" dirty="0">
+              <a:rPr lang="ar-SA" sz="950" b="1" dirty="0">
                 <a:solidFill>
                   <a:srgbClr val="FFFFFF"/>
                 </a:solidFill>
                 <a:latin typeface="Calibri" pitchFamily="34" charset="0"/>
+                <a:ea typeface="Amiri" pitchFamily="2" charset="-78"/>
                 <a:cs typeface="Amiri" pitchFamily="2" charset="-78"/>
               </a:rPr>
               <a:t>دُونَ أَنْ يَسْأَلَهُمْ</a:t>
@@ -9706,11 +9778,12 @@
               <a:buNone/>
             </a:pPr>
             <a:r>
-              <a:rPr lang="en-US" sz="950" b="1" dirty="0">
+              <a:rPr lang="ar-SA" sz="950" b="1" dirty="0">
                 <a:solidFill>
                   <a:srgbClr val="FFFFFF"/>
                 </a:solidFill>
                 <a:latin typeface="Calibri" pitchFamily="34" charset="0"/>
+                <a:ea typeface="Amiri" pitchFamily="2" charset="-78"/>
                 <a:cs typeface="Amiri" pitchFamily="2" charset="-78"/>
               </a:rPr>
               <a:t>لَوْ سَأَلَنِي … لَقُلْتُ</a:t>
@@ -9844,6 +9917,7 @@
                   <a:srgbClr val="D4AF37"/>
                 </a:solidFill>
                 <a:latin typeface="Amiri" pitchFamily="2" charset="-78"/>
+                <a:ea typeface="Amiri" pitchFamily="2" charset="-78"/>
                 <a:cs typeface="Amiri" pitchFamily="2" charset="-78"/>
               </a:rPr>
               <a:t>م</a:t>
@@ -10101,6 +10175,7 @@
                   <a:srgbClr val="8A6D1E"/>
                 </a:solidFill>
                 <a:latin typeface="Amiri" pitchFamily="2" charset="-78"/>
+                <a:ea typeface="Amiri" pitchFamily="2" charset="-78"/>
                 <a:cs typeface="Amiri" pitchFamily="2" charset="-78"/>
               </a:rPr>
               <a:t>ب</a:t>
@@ -10165,6 +10240,7 @@
                   <a:srgbClr val="1B3B6F"/>
                 </a:solidFill>
                 <a:latin typeface="Amiri" pitchFamily="2" charset="-78"/>
+                <a:ea typeface="Amiri" pitchFamily="2" charset="-78"/>
                 <a:cs typeface="Amiri" pitchFamily="2" charset="-78"/>
               </a:rPr>
               <a:t>ب</a:t>
@@ -10216,6 +10292,7 @@
                   <a:srgbClr val="8A6D1E"/>
                 </a:solidFill>
                 <a:latin typeface="Amiri" pitchFamily="2" charset="-78"/>
+                <a:ea typeface="Amiri" pitchFamily="2" charset="-78"/>
                 <a:cs typeface="Amiri" pitchFamily="2" charset="-78"/>
               </a:rPr>
               <a:t>نَمُوذَجُ الإِجَابَةِ</a:t>
@@ -10329,6 +10406,7 @@
                   <a:srgbClr val="1F2A37"/>
                 </a:solidFill>
                 <a:latin typeface="Amiri" pitchFamily="2" charset="-78"/>
+                <a:ea typeface="Amiri" pitchFamily="2" charset="-78"/>
                 <a:cs typeface="Amiri" pitchFamily="2" charset="-78"/>
               </a:rPr>
               <a:t>تَعِيشُ فِي مُدُنِنَا اليَوْمَ عَائِلَاتٌ مِنْ أَدْيَانٍ مُخْتَلِفَةٍ فِي الشَّارِعِ نَفْسِهِ، وَيَدْرُسُ أَبْنَاؤُهَا فِي الصَّفِّ نَفْسِهِ. فَكَيْفَ نَبْنِي احْتِرَامًا حَقِيقِيًّا بَيْنَ أَتْبَاعِ هٰذِهِ الأَدْيَانِ؟</a:t>
@@ -10348,6 +10426,7 @@
                   <a:srgbClr val="1F2A37"/>
                 </a:solidFill>
                 <a:latin typeface="Amiri" pitchFamily="2" charset="-78"/>
+                <a:ea typeface="Amiri" pitchFamily="2" charset="-78"/>
                 <a:cs typeface="Amiri" pitchFamily="2" charset="-78"/>
               </a:rPr>
               <a:t>أَوَّلًا، إِنَّ المَعْرِفَةَ أَسَاسُ الاحْتِرَامِ؛ فَالخَوْفُ مِنَ الآخَرِ يَأْتِي غَالِبًا مِنَ الجَهْلِ بِهِ. لِذٰلِكَ أَرَى أَنَّ دُرُوسَ الدِّرَاسَاتِ الدِّينِيَّةِ وَزِيَارَاتِ أَمَاكِنِ العِبَادَةِ مُهِمَّةٌ جِدًّا لِلطُّلَّابِ، لِأَنَّهَا تُحَوِّلُ الغَرِيبَ إِلَى جَارٍ مَعْرُوفٍ. ثَانِيًا، لَا يَعْنِي الاحْتِرَامُ أَنْ نَتَّفِقَ فِي كُلِّ شَيْءٍ، بَلْ أَنْ نَعْتَرِفَ بِحَقِّ كُلِّ إِنْسَانٍ فِي إِيمَانِهِ.</a:t>
@@ -10367,6 +10446,7 @@
                   <a:srgbClr val="1F2A37"/>
                 </a:solidFill>
                 <a:latin typeface="Amiri" pitchFamily="2" charset="-78"/>
+                <a:ea typeface="Amiri" pitchFamily="2" charset="-78"/>
                 <a:cs typeface="Amiri" pitchFamily="2" charset="-78"/>
               </a:rPr>
               <a:t>وَقَدْ رَأَيْتُ ذٰلِكَ عِنْدَمَا نَظَّمَتْ مَدْرَسَتِي "أُسْبُوعَ الأَدْيَانِ"؛ فَقَدَّمَ كُلُّ طَالِبٍ عِيدًا مِنْ أَعْيَادِ دِينِهِ، وَتَذَوَّقْنَا حَلَوِيَّاتٍ مِنْ ثَقَافَاتٍ كَثِيرَةٍ، وَطَرَحْنَا أَسْئِلَةً بِأَدَبٍ وَفُضُولٍ. وَبَعْدَ ذٰلِكَ الأُسْبُوعِ، قَلَّتِ التَّعْلِيقَاتُ السَّلْبِيَّةُ فِي المَدْرَسَةِ بِشَكْلٍ وَاضِحٍ، وَزَادَتِ الصَّدَاقَاتُ.</a:t>
@@ -10386,6 +10466,7 @@
                   <a:srgbClr val="1F2A37"/>
                 </a:solidFill>
                 <a:latin typeface="Amiri" pitchFamily="2" charset="-78"/>
+                <a:ea typeface="Amiri" pitchFamily="2" charset="-78"/>
                 <a:cs typeface="Amiri" pitchFamily="2" charset="-78"/>
               </a:rPr>
               <a:t>صَحِيحٌ أَنَّ بِنَاءَ الثِّقَةِ يَحْتَاجُ إِلَى وَقْتٍ، غَيْرَ أَنَّ كُلَّ خُطْوَةٍ صَغِيرَةٍ تَصْنَعُ فَرْقًا. وَإِذَا تَعَلَّمَ الأَطْفَالُ الاحْتِرَامَ فِي المَدْرَسَةِ، فَسَيَنْقُلُونَهُ إِلَى بُيُوتِهِمْ وَمُجْتَمَعَاتِهِمْ فِي المُسْتَقْبَلِ.</a:t>
@@ -10484,11 +10565,12 @@
               <a:buNone/>
             </a:pPr>
             <a:r>
-              <a:rPr lang="en-US" sz="950" b="1" dirty="0">
+              <a:rPr lang="ar-SA" sz="950" b="1" dirty="0">
                 <a:solidFill>
                   <a:srgbClr val="FFFFFF"/>
                 </a:solidFill>
                 <a:latin typeface="Calibri" pitchFamily="34" charset="0"/>
+                <a:ea typeface="Amiri" pitchFamily="2" charset="-78"/>
                 <a:cs typeface="Amiri" pitchFamily="2" charset="-78"/>
               </a:rPr>
               <a:t>إِنَّ المَعْرِفَةَ أَسَاسُ</a:t>
@@ -10549,11 +10631,12 @@
               <a:buNone/>
             </a:pPr>
             <a:r>
-              <a:rPr lang="en-US" sz="950" b="1" dirty="0">
+              <a:rPr lang="ar-SA" sz="950" b="1" dirty="0">
                 <a:solidFill>
                   <a:srgbClr val="FFFFFF"/>
                 </a:solidFill>
                 <a:latin typeface="Calibri" pitchFamily="34" charset="0"/>
+                <a:ea typeface="Amiri" pitchFamily="2" charset="-78"/>
                 <a:cs typeface="Amiri" pitchFamily="2" charset="-78"/>
               </a:rPr>
               <a:t>لَا يَعْنِي … أَنْ … بَلْ أَنْ</a:t>
@@ -10614,11 +10697,12 @@
               <a:buNone/>
             </a:pPr>
             <a:r>
-              <a:rPr lang="en-US" sz="950" b="1" dirty="0">
+              <a:rPr lang="ar-SA" sz="950" b="1" dirty="0">
                 <a:solidFill>
                   <a:srgbClr val="FFFFFF"/>
                 </a:solidFill>
                 <a:latin typeface="Calibri" pitchFamily="34" charset="0"/>
+                <a:ea typeface="Amiri" pitchFamily="2" charset="-78"/>
                 <a:cs typeface="Amiri" pitchFamily="2" charset="-78"/>
               </a:rPr>
               <a:t>قَلَّتِ التَّعْلِيقَاتُ</a:t>
@@ -10679,11 +10763,12 @@
               <a:buNone/>
             </a:pPr>
             <a:r>
-              <a:rPr lang="en-US" sz="950" b="1" dirty="0">
+              <a:rPr lang="ar-SA" sz="950" b="1" dirty="0">
                 <a:solidFill>
                   <a:srgbClr val="FFFFFF"/>
                 </a:solidFill>
                 <a:latin typeface="Calibri" pitchFamily="34" charset="0"/>
+                <a:ea typeface="Amiri" pitchFamily="2" charset="-78"/>
                 <a:cs typeface="Amiri" pitchFamily="2" charset="-78"/>
               </a:rPr>
               <a:t>إِذَا تَعَلَّمَ … فَسَيَنْقُلُونَهُ</a:t>
@@ -10817,6 +10902,7 @@
                   <a:srgbClr val="D4AF37"/>
                 </a:solidFill>
                 <a:latin typeface="Amiri" pitchFamily="2" charset="-78"/>
+                <a:ea typeface="Amiri" pitchFamily="2" charset="-78"/>
                 <a:cs typeface="Amiri" pitchFamily="2" charset="-78"/>
               </a:rPr>
               <a:t>م</a:t>
@@ -11137,6 +11223,7 @@
                   <a:srgbClr val="8A6D1E"/>
                 </a:solidFill>
                 <a:latin typeface="Amiri" pitchFamily="2" charset="-78"/>
+                <a:ea typeface="Amiri" pitchFamily="2" charset="-78"/>
                 <a:cs typeface="Amiri" pitchFamily="2" charset="-78"/>
               </a:rPr>
               <a:t>قَيِّمْ عَمَلَكَ</a:t>
@@ -12381,6 +12468,7 @@
                   <a:srgbClr val="FFFFFF"/>
                 </a:solidFill>
                 <a:latin typeface="Amiri" pitchFamily="2" charset="-78"/>
+                <a:ea typeface="Amiri" pitchFamily="2" charset="-78"/>
                 <a:cs typeface="Amiri" pitchFamily="2" charset="-78"/>
               </a:rPr>
               <a:t>أَحْسَنْتُمْ! إِلَى اللِّقَاءِ</a:t>
@@ -12533,6 +12621,7 @@
                   <a:srgbClr val="D4AF37"/>
                 </a:solidFill>
                 <a:latin typeface="Amiri" pitchFamily="2" charset="-78"/>
+                <a:ea typeface="Amiri" pitchFamily="2" charset="-78"/>
                 <a:cs typeface="Amiri" pitchFamily="2" charset="-78"/>
               </a:rPr>
               <a:t>وَرْشَةُ التَّدْرِيبِ</a:t>
@@ -12666,6 +12755,7 @@
                   <a:srgbClr val="D4AF37"/>
                 </a:solidFill>
                 <a:latin typeface="Amiri" pitchFamily="2" charset="-78"/>
+                <a:ea typeface="Amiri" pitchFamily="2" charset="-78"/>
                 <a:cs typeface="Amiri" pitchFamily="2" charset="-78"/>
               </a:rPr>
               <a:t>م</a:t>
@@ -12986,6 +13076,7 @@
                   <a:srgbClr val="8A6D1E"/>
                 </a:solidFill>
                 <a:latin typeface="Amiri" pitchFamily="2" charset="-78"/>
+                <a:ea typeface="Amiri" pitchFamily="2" charset="-78"/>
                 <a:cs typeface="Amiri" pitchFamily="2" charset="-78"/>
               </a:rPr>
               <a:t>آدَابُ الصَّفِّ</a:t>
@@ -14517,6 +14608,7 @@
                   <a:srgbClr val="D4AF37"/>
                 </a:solidFill>
                 <a:latin typeface="Amiri" pitchFamily="2" charset="-78"/>
+                <a:ea typeface="Amiri" pitchFamily="2" charset="-78"/>
                 <a:cs typeface="Amiri" pitchFamily="2" charset="-78"/>
               </a:rPr>
               <a:t>م</a:t>
@@ -14837,6 +14929,7 @@
                   <a:srgbClr val="8A6D1E"/>
                 </a:solidFill>
                 <a:latin typeface="Amiri" pitchFamily="2" charset="-78"/>
+                <a:ea typeface="Amiri" pitchFamily="2" charset="-78"/>
                 <a:cs typeface="Amiri" pitchFamily="2" charset="-78"/>
               </a:rPr>
               <a:t>خَرِيطَةُ الوَرْشَةِ</a:t>
@@ -15151,6 +15244,7 @@
                   <a:srgbClr val="1B3B6F"/>
                 </a:solidFill>
                 <a:latin typeface="Amiri" pitchFamily="2" charset="-78"/>
+                <a:ea typeface="Amiri" pitchFamily="2" charset="-78"/>
                 <a:cs typeface="Amiri" pitchFamily="2" charset="-78"/>
               </a:rPr>
               <a:t>كَيْفَ</a:t>
@@ -15427,6 +15521,7 @@
                   <a:srgbClr val="1E6B52"/>
                 </a:solidFill>
                 <a:latin typeface="Amiri" pitchFamily="2" charset="-78"/>
+                <a:ea typeface="Amiri" pitchFamily="2" charset="-78"/>
                 <a:cs typeface="Amiri" pitchFamily="2" charset="-78"/>
               </a:rPr>
               <a:t>الاسْتِمَارَةُ</a:t>
@@ -15703,6 +15798,7 @@
                   <a:srgbClr val="1E6B52"/>
                 </a:solidFill>
                 <a:latin typeface="Amiri" pitchFamily="2" charset="-78"/>
+                <a:ea typeface="Amiri" pitchFamily="2" charset="-78"/>
                 <a:cs typeface="Amiri" pitchFamily="2" charset="-78"/>
               </a:rPr>
               <a:t>الرِّسَالَةُ</a:t>
@@ -15979,6 +16075,7 @@
                   <a:srgbClr val="1E6B52"/>
                 </a:solidFill>
                 <a:latin typeface="Amiri" pitchFamily="2" charset="-78"/>
+                <a:ea typeface="Amiri" pitchFamily="2" charset="-78"/>
                 <a:cs typeface="Amiri" pitchFamily="2" charset="-78"/>
               </a:rPr>
               <a:t>المَقَالُ</a:t>
@@ -16255,6 +16352,7 @@
                   <a:srgbClr val="8A6D1E"/>
                 </a:solidFill>
                 <a:latin typeface="Amiri" pitchFamily="2" charset="-78"/>
+                <a:ea typeface="Amiri" pitchFamily="2" charset="-78"/>
                 <a:cs typeface="Amiri" pitchFamily="2" charset="-78"/>
               </a:rPr>
               <a:t>قَيِّمْ</a:t>
@@ -16498,6 +16596,7 @@
                   <a:srgbClr val="D4AF37"/>
                 </a:solidFill>
                 <a:latin typeface="Amiri" pitchFamily="2" charset="-78"/>
+                <a:ea typeface="Amiri" pitchFamily="2" charset="-78"/>
                 <a:cs typeface="Amiri" pitchFamily="2" charset="-78"/>
               </a:rPr>
               <a:t>م</a:t>
@@ -16818,6 +16917,7 @@
                   <a:srgbClr val="8A6D1E"/>
                 </a:solidFill>
                 <a:latin typeface="Amiri" pitchFamily="2" charset="-78"/>
+                <a:ea typeface="Amiri" pitchFamily="2" charset="-78"/>
                 <a:cs typeface="Amiri" pitchFamily="2" charset="-78"/>
               </a:rPr>
               <a:t>امْتِحَانُ الكِتَابَةِ</a:t>
@@ -17442,6 +17542,7 @@
                   <a:srgbClr val="1B3B6F"/>
                 </a:solidFill>
                 <a:latin typeface="Amiri" pitchFamily="2" charset="-78"/>
+                <a:ea typeface="Amiri" pitchFamily="2" charset="-78"/>
                 <a:cs typeface="Amiri" pitchFamily="2" charset="-78"/>
               </a:rPr>
               <a:t>زُرْنَا الكَاتِدْرَائِيَّةَ الَّتِي فِي وَسَطِ المَدِينَةِ</a:t>
@@ -17541,6 +17642,7 @@
                   <a:srgbClr val="1B3B6F"/>
                 </a:solidFill>
                 <a:latin typeface="Amiri" pitchFamily="2" charset="-78"/>
+                <a:ea typeface="Amiri" pitchFamily="2" charset="-78"/>
                 <a:cs typeface="Amiri" pitchFamily="2" charset="-78"/>
               </a:rPr>
               <a:t>فِي حَيِّي مَسْجِدٌ كَبِيرٌ، يَقَعُ أَمَامَ الحَدِيقَةِ</a:t>
@@ -17640,6 +17742,7 @@
                   <a:srgbClr val="1B3B6F"/>
                 </a:solidFill>
                 <a:latin typeface="Amiri" pitchFamily="2" charset="-78"/>
+                <a:ea typeface="Amiri" pitchFamily="2" charset="-78"/>
                 <a:cs typeface="Amiri" pitchFamily="2" charset="-78"/>
               </a:rPr>
               <a:t>تَعَلَّمْتُ أَنَّ كُلَّ الأَمَاكِنِ تُرَحِّبُ بِالزُّوَّارِ</a:t>
@@ -17811,6 +17914,7 @@
                   <a:srgbClr val="D4AF37"/>
                 </a:solidFill>
                 <a:latin typeface="Amiri" pitchFamily="2" charset="-78"/>
+                <a:ea typeface="Amiri" pitchFamily="2" charset="-78"/>
                 <a:cs typeface="Amiri" pitchFamily="2" charset="-78"/>
               </a:rPr>
               <a:t>م</a:t>
@@ -18131,6 +18235,7 @@
                   <a:srgbClr val="8A6D1E"/>
                 </a:solidFill>
                 <a:latin typeface="Amiri" pitchFamily="2" charset="-78"/>
+                <a:ea typeface="Amiri" pitchFamily="2" charset="-78"/>
                 <a:cs typeface="Amiri" pitchFamily="2" charset="-78"/>
               </a:rPr>
               <a:t>اسْتِمَارَةُ بَرْنَامَجِ زِيَارَةِ أَمَاكِنِ العِبَادَةِ</a:t>
@@ -18487,6 +18592,7 @@
                   <a:srgbClr val="1B3B6F"/>
                 </a:solidFill>
                 <a:latin typeface="Amiri" pitchFamily="2" charset="-78"/>
+                <a:ea typeface="Amiri" pitchFamily="2" charset="-78"/>
                 <a:cs typeface="Amiri" pitchFamily="2" charset="-78"/>
               </a:rPr>
               <a:t>الاسْمُ</a:t>
@@ -18731,6 +18837,7 @@
                   <a:srgbClr val="1B3B6F"/>
                 </a:solidFill>
                 <a:latin typeface="Amiri" pitchFamily="2" charset="-78"/>
+                <a:ea typeface="Amiri" pitchFamily="2" charset="-78"/>
                 <a:cs typeface="Amiri" pitchFamily="2" charset="-78"/>
               </a:rPr>
               <a:t>المَدْرَسَةُ</a:t>
@@ -18975,6 +19082,7 @@
                   <a:srgbClr val="1B3B6F"/>
                 </a:solidFill>
                 <a:latin typeface="Amiri" pitchFamily="2" charset="-78"/>
+                <a:ea typeface="Amiri" pitchFamily="2" charset="-78"/>
                 <a:cs typeface="Amiri" pitchFamily="2" charset="-78"/>
               </a:rPr>
               <a:t>المَدِينَةُ</a:t>
@@ -19219,6 +19327,7 @@
                   <a:srgbClr val="1B3B6F"/>
                 </a:solidFill>
                 <a:latin typeface="Amiri" pitchFamily="2" charset="-78"/>
+                <a:ea typeface="Amiri" pitchFamily="2" charset="-78"/>
                 <a:cs typeface="Amiri" pitchFamily="2" charset="-78"/>
               </a:rPr>
               <a:t>مَكَانُ عِبَادَةٍ قُرْبَ بَيْتِكَ</a:t>
@@ -19463,6 +19572,7 @@
                   <a:srgbClr val="1B3B6F"/>
                 </a:solidFill>
                 <a:latin typeface="Amiri" pitchFamily="2" charset="-78"/>
+                <a:ea typeface="Amiri" pitchFamily="2" charset="-78"/>
                 <a:cs typeface="Amiri" pitchFamily="2" charset="-78"/>
               </a:rPr>
               <a:t>مَكَانٌ تُرِيدُ زِيَارَتَهُ</a:t>
@@ -19707,6 +19817,7 @@
                   <a:srgbClr val="1B3B6F"/>
                 </a:solidFill>
                 <a:latin typeface="Amiri" pitchFamily="2" charset="-78"/>
+                <a:ea typeface="Amiri" pitchFamily="2" charset="-78"/>
                 <a:cs typeface="Amiri" pitchFamily="2" charset="-78"/>
               </a:rPr>
               <a:t>اللُّغَاتُ</a:t>
@@ -19951,6 +20062,7 @@
                   <a:srgbClr val="1B3B6F"/>
                 </a:solidFill>
                 <a:latin typeface="Amiri" pitchFamily="2" charset="-78"/>
+                <a:ea typeface="Amiri" pitchFamily="2" charset="-78"/>
                 <a:cs typeface="Amiri" pitchFamily="2" charset="-78"/>
               </a:rPr>
               <a:t>سُؤَالٌ تُرِيدُ أَنْ تَسْأَلَهُ</a:t>
@@ -20130,6 +20242,7 @@
                   <a:srgbClr val="1B3B6F"/>
                 </a:solidFill>
                 <a:latin typeface="Amiri" pitchFamily="2" charset="-78"/>
+                <a:ea typeface="Amiri" pitchFamily="2" charset="-78"/>
                 <a:cs typeface="Amiri" pitchFamily="2" charset="-78"/>
               </a:rPr>
               <a:t>جُمْلَةٌ: لِمَاذَا تُرِيدُ المُشَارَكَةَ؟</a:t>
@@ -20339,6 +20452,7 @@
                   <a:srgbClr val="D4AF37"/>
                 </a:solidFill>
                 <a:latin typeface="Amiri" pitchFamily="2" charset="-78"/>
+                <a:ea typeface="Amiri" pitchFamily="2" charset="-78"/>
                 <a:cs typeface="Amiri" pitchFamily="2" charset="-78"/>
               </a:rPr>
               <a:t>م</a:t>
@@ -20659,6 +20773,7 @@
                   <a:srgbClr val="8A6D1E"/>
                 </a:solidFill>
                 <a:latin typeface="Amiri" pitchFamily="2" charset="-78"/>
+                <a:ea typeface="Amiri" pitchFamily="2" charset="-78"/>
                 <a:cs typeface="Amiri" pitchFamily="2" charset="-78"/>
               </a:rPr>
               <a:t>نَمُوذَجُ الإِجَابَةِ</a:t>
@@ -20977,6 +21092,7 @@
                   <a:srgbClr val="1B3B6F"/>
                 </a:solidFill>
                 <a:latin typeface="Amiri" pitchFamily="2" charset="-78"/>
+                <a:ea typeface="Amiri" pitchFamily="2" charset="-78"/>
                 <a:cs typeface="Amiri" pitchFamily="2" charset="-78"/>
               </a:rPr>
               <a:t>يُوسُفُ عُثْمَانُ</a:t>
@@ -21015,6 +21131,7 @@
                   <a:srgbClr val="1B3B6F"/>
                 </a:solidFill>
                 <a:latin typeface="Amiri" pitchFamily="2" charset="-78"/>
+                <a:ea typeface="Amiri" pitchFamily="2" charset="-78"/>
                 <a:cs typeface="Amiri" pitchFamily="2" charset="-78"/>
               </a:rPr>
               <a:t>الاسْمُ</a:t>
@@ -21156,6 +21273,7 @@
                   <a:srgbClr val="1B3B6F"/>
                 </a:solidFill>
                 <a:latin typeface="Amiri" pitchFamily="2" charset="-78"/>
+                <a:ea typeface="Amiri" pitchFamily="2" charset="-78"/>
                 <a:cs typeface="Amiri" pitchFamily="2" charset="-78"/>
               </a:rPr>
               <a:t>مَدْرَسَةُ لِيسْتَرَ الثَّانَوِيَّةُ</a:t>
@@ -21194,6 +21312,7 @@
                   <a:srgbClr val="1B3B6F"/>
                 </a:solidFill>
                 <a:latin typeface="Amiri" pitchFamily="2" charset="-78"/>
+                <a:ea typeface="Amiri" pitchFamily="2" charset="-78"/>
                 <a:cs typeface="Amiri" pitchFamily="2" charset="-78"/>
               </a:rPr>
               <a:t>المَدْرَسَةُ</a:t>
@@ -21335,6 +21454,7 @@
                   <a:srgbClr val="1B3B6F"/>
                 </a:solidFill>
                 <a:latin typeface="Amiri" pitchFamily="2" charset="-78"/>
+                <a:ea typeface="Amiri" pitchFamily="2" charset="-78"/>
                 <a:cs typeface="Amiri" pitchFamily="2" charset="-78"/>
               </a:rPr>
               <a:t>لِيسْتَرُ</a:t>
@@ -21373,6 +21493,7 @@
                   <a:srgbClr val="1B3B6F"/>
                 </a:solidFill>
                 <a:latin typeface="Amiri" pitchFamily="2" charset="-78"/>
+                <a:ea typeface="Amiri" pitchFamily="2" charset="-78"/>
                 <a:cs typeface="Amiri" pitchFamily="2" charset="-78"/>
               </a:rPr>
               <a:t>المَدِينَةُ</a:t>
@@ -21514,6 +21635,7 @@
                   <a:srgbClr val="1B3B6F"/>
                 </a:solidFill>
                 <a:latin typeface="Amiri" pitchFamily="2" charset="-78"/>
+                <a:ea typeface="Amiri" pitchFamily="2" charset="-78"/>
                 <a:cs typeface="Amiri" pitchFamily="2" charset="-78"/>
               </a:rPr>
               <a:t>مَسْجِدُ النُّورِ</a:t>
@@ -21552,6 +21674,7 @@
                   <a:srgbClr val="1B3B6F"/>
                 </a:solidFill>
                 <a:latin typeface="Amiri" pitchFamily="2" charset="-78"/>
+                <a:ea typeface="Amiri" pitchFamily="2" charset="-78"/>
                 <a:cs typeface="Amiri" pitchFamily="2" charset="-78"/>
               </a:rPr>
               <a:t>مَكَانُ عِبَادَةٍ قُرْبَ بَيْتِكَ</a:t>
@@ -21693,6 +21816,7 @@
                   <a:srgbClr val="1B3B6F"/>
                 </a:solidFill>
                 <a:latin typeface="Amiri" pitchFamily="2" charset="-78"/>
+                <a:ea typeface="Amiri" pitchFamily="2" charset="-78"/>
                 <a:cs typeface="Amiri" pitchFamily="2" charset="-78"/>
               </a:rPr>
               <a:t>كَنِيسُ المَدِينَةِ</a:t>
@@ -21731,6 +21855,7 @@
                   <a:srgbClr val="1B3B6F"/>
                 </a:solidFill>
                 <a:latin typeface="Amiri" pitchFamily="2" charset="-78"/>
+                <a:ea typeface="Amiri" pitchFamily="2" charset="-78"/>
                 <a:cs typeface="Amiri" pitchFamily="2" charset="-78"/>
               </a:rPr>
               <a:t>مَكَانٌ تُرِيدُ زِيَارَتَهُ</a:t>
@@ -21872,6 +21997,7 @@
                   <a:srgbClr val="1B3B6F"/>
                 </a:solidFill>
                 <a:latin typeface="Amiri" pitchFamily="2" charset="-78"/>
+                <a:ea typeface="Amiri" pitchFamily="2" charset="-78"/>
                 <a:cs typeface="Amiri" pitchFamily="2" charset="-78"/>
               </a:rPr>
               <a:t>الإِنْجْلِيزِيَّةُ وَالعَرَبِيَّةُ وَالصُّومَالِيَّةُ</a:t>
@@ -21910,6 +22036,7 @@
                   <a:srgbClr val="1B3B6F"/>
                 </a:solidFill>
                 <a:latin typeface="Amiri" pitchFamily="2" charset="-78"/>
+                <a:ea typeface="Amiri" pitchFamily="2" charset="-78"/>
                 <a:cs typeface="Amiri" pitchFamily="2" charset="-78"/>
               </a:rPr>
               <a:t>اللُّغَاتُ</a:t>
@@ -22051,6 +22178,7 @@
                   <a:srgbClr val="1B3B6F"/>
                 </a:solidFill>
                 <a:latin typeface="Amiri" pitchFamily="2" charset="-78"/>
+                <a:ea typeface="Amiri" pitchFamily="2" charset="-78"/>
                 <a:cs typeface="Amiri" pitchFamily="2" charset="-78"/>
               </a:rPr>
               <a:t>مَا أَهَمُّ عِيدٍ عِنْدَكُمْ؟</a:t>
@@ -22089,6 +22217,7 @@
                   <a:srgbClr val="1B3B6F"/>
                 </a:solidFill>
                 <a:latin typeface="Amiri" pitchFamily="2" charset="-78"/>
+                <a:ea typeface="Amiri" pitchFamily="2" charset="-78"/>
                 <a:cs typeface="Amiri" pitchFamily="2" charset="-78"/>
               </a:rPr>
               <a:t>سُؤَالٌ تُرِيدُ أَنْ تَسْأَلَهُ</a:t>
@@ -22230,6 +22359,7 @@
                   <a:srgbClr val="1B3B6F"/>
                 </a:solidFill>
                 <a:latin typeface="Amiri" pitchFamily="2" charset="-78"/>
+                <a:ea typeface="Amiri" pitchFamily="2" charset="-78"/>
                 <a:cs typeface="Amiri" pitchFamily="2" charset="-78"/>
               </a:rPr>
               <a:t>أُرِيدُ أَنْ أَفْهَمَ جِيرَانِي الَّذِينَ يَعِيشُونَ فِي حَيِّي.</a:t>
@@ -22268,6 +22398,7 @@
                   <a:srgbClr val="1B3B6F"/>
                 </a:solidFill>
                 <a:latin typeface="Amiri" pitchFamily="2" charset="-78"/>
+                <a:ea typeface="Amiri" pitchFamily="2" charset="-78"/>
                 <a:cs typeface="Amiri" pitchFamily="2" charset="-78"/>
               </a:rPr>
               <a:t>جُمْلَةٌ: لِمَاذَا تُرِيدُ المُشَارَكَةَ؟</a:t>
@@ -22477,6 +22608,7 @@
                   <a:srgbClr val="D4AF37"/>
                 </a:solidFill>
                 <a:latin typeface="Amiri" pitchFamily="2" charset="-78"/>
+                <a:ea typeface="Amiri" pitchFamily="2" charset="-78"/>
                 <a:cs typeface="Amiri" pitchFamily="2" charset="-78"/>
               </a:rPr>
               <a:t>م</a:t>
@@ -22797,6 +22929,7 @@
                   <a:srgbClr val="8A6D1E"/>
                 </a:solidFill>
                 <a:latin typeface="Amiri" pitchFamily="2" charset="-78"/>
+                <a:ea typeface="Amiri" pitchFamily="2" charset="-78"/>
                 <a:cs typeface="Amiri" pitchFamily="2" charset="-78"/>
               </a:rPr>
               <a:t>زِيَارَةُ أَمَاكِنِ العِبَادَةِ</a:t>
@@ -23272,6 +23405,7 @@
                   <a:srgbClr val="1B3B6F"/>
                 </a:solidFill>
                 <a:latin typeface="Amiri" pitchFamily="2" charset="-78"/>
+                <a:ea typeface="Amiri" pitchFamily="2" charset="-78"/>
                 <a:cs typeface="Amiri" pitchFamily="2" charset="-78"/>
               </a:rPr>
               <a:t>زُرْنَا مَعَ المَدْرَسَةِ …</a:t>
@@ -23348,6 +23482,7 @@
                   <a:srgbClr val="1B3B6F"/>
                 </a:solidFill>
                 <a:latin typeface="Amiri" pitchFamily="2" charset="-78"/>
+                <a:ea typeface="Amiri" pitchFamily="2" charset="-78"/>
                 <a:cs typeface="Amiri" pitchFamily="2" charset="-78"/>
               </a:rPr>
               <a:t>… الَّتِي فِي وَسَطِ المَدِينَةِ</a:t>
@@ -23424,6 +23559,7 @@
                   <a:srgbClr val="1B3B6F"/>
                 </a:solidFill>
                 <a:latin typeface="Amiri" pitchFamily="2" charset="-78"/>
+                <a:ea typeface="Amiri" pitchFamily="2" charset="-78"/>
                 <a:cs typeface="Amiri" pitchFamily="2" charset="-78"/>
               </a:rPr>
               <a:t>تَعَلَّمْتُ أَنَّ …</a:t>
@@ -23500,6 +23636,7 @@
                   <a:srgbClr val="1B3B6F"/>
                 </a:solidFill>
                 <a:latin typeface="Amiri" pitchFamily="2" charset="-78"/>
+                <a:ea typeface="Amiri" pitchFamily="2" charset="-78"/>
                 <a:cs typeface="Amiri" pitchFamily="2" charset="-78"/>
               </a:rPr>
               <a:t>فِي الشَّهْرِ القَادِمِ سَنَزُورُ …</a:t>
@@ -23671,6 +23808,7 @@
                   <a:srgbClr val="D4AF37"/>
                 </a:solidFill>
                 <a:latin typeface="Amiri" pitchFamily="2" charset="-78"/>
+                <a:ea typeface="Amiri" pitchFamily="2" charset="-78"/>
                 <a:cs typeface="Amiri" pitchFamily="2" charset="-78"/>
               </a:rPr>
               <a:t>م</a:t>
@@ -23991,6 +24129,7 @@
                   <a:srgbClr val="8A6D1E"/>
                 </a:solidFill>
                 <a:latin typeface="Amiri" pitchFamily="2" charset="-78"/>
+                <a:ea typeface="Amiri" pitchFamily="2" charset="-78"/>
                 <a:cs typeface="Amiri" pitchFamily="2" charset="-78"/>
               </a:rPr>
               <a:t>نَصُّ السُّؤَالِ</a:t>
@@ -24271,6 +24410,7 @@
                   <a:srgbClr val="1B3B6F"/>
                 </a:solidFill>
                 <a:latin typeface="Amiri" pitchFamily="2" charset="-78"/>
+                <a:ea typeface="Amiri" pitchFamily="2" charset="-78"/>
                 <a:cs typeface="Amiri" pitchFamily="2" charset="-78"/>
               </a:rPr>
               <a:t>اكْتُبْ رِسَالَةً إِلَى صَدِيقِكَ عَنْ زِيَارَةِ أَمَاكِنِ العِبَادَةِ (٨٠–٩٠ كَلِمَةً).</a:t>
@@ -24412,6 +24552,7 @@
                   <a:srgbClr val="1B3B6F"/>
                 </a:solidFill>
                 <a:latin typeface="Amiri" pitchFamily="2" charset="-78"/>
+                <a:ea typeface="Amiri" pitchFamily="2" charset="-78"/>
                 <a:cs typeface="Amiri" pitchFamily="2" charset="-78"/>
               </a:rPr>
               <a:t>أَيْنَ ذَهَبْتُمْ؟</a:t>
@@ -24553,6 +24694,7 @@
                   <a:srgbClr val="1B3B6F"/>
                 </a:solidFill>
                 <a:latin typeface="Amiri" pitchFamily="2" charset="-78"/>
+                <a:ea typeface="Amiri" pitchFamily="2" charset="-78"/>
                 <a:cs typeface="Amiri" pitchFamily="2" charset="-78"/>
               </a:rPr>
               <a:t>صِفْ مَكَانًا مِنْهَا.</a:t>
@@ -24694,6 +24836,7 @@
                   <a:srgbClr val="1B3B6F"/>
                 </a:solidFill>
                 <a:latin typeface="Amiri" pitchFamily="2" charset="-78"/>
+                <a:ea typeface="Amiri" pitchFamily="2" charset="-78"/>
                 <a:cs typeface="Amiri" pitchFamily="2" charset="-78"/>
               </a:rPr>
               <a:t>مَاذَا تَعَلَّمْتَ؟</a:t>
@@ -24835,6 +24978,7 @@
                   <a:srgbClr val="1B3B6F"/>
                 </a:solidFill>
                 <a:latin typeface="Amiri" pitchFamily="2" charset="-78"/>
+                <a:ea typeface="Amiri" pitchFamily="2" charset="-78"/>
                 <a:cs typeface="Amiri" pitchFamily="2" charset="-78"/>
               </a:rPr>
               <a:t>مَا رَأْيُكَ؟ وَمَاذَا سَتَزُورُونَ بَعْدَ ذٰلِكَ؟ وَاسْأَلْ صَدِيقَكَ سُؤَالًا.</a:t>
@@ -25044,6 +25188,7 @@
                   <a:srgbClr val="D4AF37"/>
                 </a:solidFill>
                 <a:latin typeface="Amiri" pitchFamily="2" charset="-78"/>
+                <a:ea typeface="Amiri" pitchFamily="2" charset="-78"/>
                 <a:cs typeface="Amiri" pitchFamily="2" charset="-78"/>
               </a:rPr>
               <a:t>م</a:t>
@@ -25364,6 +25509,7 @@
                   <a:srgbClr val="8A6D1E"/>
                 </a:solidFill>
                 <a:latin typeface="Amiri" pitchFamily="2" charset="-78"/>
+                <a:ea typeface="Amiri" pitchFamily="2" charset="-78"/>
                 <a:cs typeface="Amiri" pitchFamily="2" charset="-78"/>
               </a:rPr>
               <a:t>قَوَالِبُ الكِتَابَةِ</a:t>
@@ -25644,6 +25790,7 @@
                   <a:srgbClr val="1B3B6F"/>
                 </a:solidFill>
                 <a:latin typeface="Amiri" pitchFamily="2" charset="-78"/>
+                <a:ea typeface="Amiri" pitchFamily="2" charset="-78"/>
                 <a:cs typeface="Amiri" pitchFamily="2" charset="-78"/>
               </a:rPr>
               <a:t>مَرْحَبًا يَا ______ ، كَيْفَ حَالُكَ؟</a:t>
@@ -25850,6 +25997,7 @@
                   <a:srgbClr val="1B3B6F"/>
                 </a:solidFill>
                 <a:latin typeface="Amiri" pitchFamily="2" charset="-78"/>
+                <a:ea typeface="Amiri" pitchFamily="2" charset="-78"/>
                 <a:cs typeface="Amiri" pitchFamily="2" charset="-78"/>
               </a:rPr>
               <a:t>زُرْنَا مَعَ المَدْرَسَةِ ______ .</a:t>
@@ -26056,6 +26204,7 @@
                   <a:srgbClr val="1B3B6F"/>
                 </a:solidFill>
                 <a:latin typeface="Amiri" pitchFamily="2" charset="-78"/>
+                <a:ea typeface="Amiri" pitchFamily="2" charset="-78"/>
                 <a:cs typeface="Amiri" pitchFamily="2" charset="-78"/>
               </a:rPr>
               <a:t>زُرْنَا ______ الَّتِي ______ . هِيَ ______ .</a:t>
@@ -26262,6 +26411,7 @@
                   <a:srgbClr val="1B3B6F"/>
                 </a:solidFill>
                 <a:latin typeface="Amiri" pitchFamily="2" charset="-78"/>
+                <a:ea typeface="Amiri" pitchFamily="2" charset="-78"/>
                 <a:cs typeface="Amiri" pitchFamily="2" charset="-78"/>
               </a:rPr>
               <a:t>تَعَلَّمْتُ أَنَّ ______ .</a:t>
@@ -26468,6 +26618,7 @@
                   <a:srgbClr val="1B3B6F"/>
                 </a:solidFill>
                 <a:latin typeface="Amiri" pitchFamily="2" charset="-78"/>
+                <a:ea typeface="Amiri" pitchFamily="2" charset="-78"/>
                 <a:cs typeface="Amiri" pitchFamily="2" charset="-78"/>
               </a:rPr>
               <a:t>أَظُنُّ أَنَّ ______ . سَنَزُورُ ______ .</a:t>
@@ -26674,6 +26825,7 @@
                   <a:srgbClr val="1B3B6F"/>
                 </a:solidFill>
                 <a:latin typeface="Amiri" pitchFamily="2" charset="-78"/>
+                <a:ea typeface="Amiri" pitchFamily="2" charset="-78"/>
                 <a:cs typeface="Amiri" pitchFamily="2" charset="-78"/>
               </a:rPr>
               <a:t>وَأَنْتَ، ______ ؟ مَعَ السَّلَامَةِ.</a:t>
@@ -26913,13 +27065,9 @@
     <a:fontScheme name="Office">
       <a:majorFont>
         <a:latin typeface="Calibri Light" panose="020F0302020204030204"/>
-        <a:ea typeface=""/>
-        <a:cs typeface=""/>
-        <a:font script="Jpan" typeface="游ゴシック Light"/>
-        <a:font script="Hang" typeface="맑은 고딕"/>
-        <a:font script="Hans" typeface="等线 Light"/>
-        <a:font script="Hant" typeface="新細明體"/>
-        <a:font script="Arab" typeface="Times New Roman"/>
+        <a:ea typeface="Amiri" pitchFamily="2" charset="-78"/>
+        <a:cs typeface="Amiri" pitchFamily="2" charset="-78"/>
+        <a:font script="Arab" typeface="Amiri"/>
         <a:font script="Hebr" typeface="Times New Roman"/>
         <a:font script="Thai" typeface="Angsana New"/>
         <a:font script="Ethi" typeface="Nyala"/>
@@ -26965,13 +27113,9 @@
       </a:majorFont>
       <a:minorFont>
         <a:latin typeface="Calibri" panose="020F0502020204030204"/>
-        <a:ea typeface=""/>
-        <a:cs typeface=""/>
-        <a:font script="Jpan" typeface="游ゴシック"/>
-        <a:font script="Hang" typeface="맑은 고딕"/>
-        <a:font script="Hans" typeface="等线"/>
-        <a:font script="Hant" typeface="新細明體"/>
-        <a:font script="Arab" typeface="Arial"/>
+        <a:ea typeface="Amiri" pitchFamily="2" charset="-78"/>
+        <a:cs typeface="Amiri" pitchFamily="2" charset="-78"/>
+        <a:font script="Arab" typeface="Amiri"/>
         <a:font script="Hebr" typeface="Arial"/>
         <a:font script="Thai" typeface="Cordia New"/>
         <a:font script="Ethi" typeface="Nyala"/>

--- a/Topic_E/Exam_Practice/TE-L05_Writing_Workshop_Faiths_Beliefs_and_Places_of_Worship.pptx
+++ b/Topic_E/Exam_Practice/TE-L05_Writing_Workshop_Faiths_Beliefs_and_Places_of_Worship.pptx
@@ -3848,7 +3848,7 @@
                 <a:solidFill>
                   <a:srgbClr val="FFFFFF"/>
                 </a:solidFill>
-                <a:latin typeface="Calibri" pitchFamily="34" charset="0"/>
+                <a:latin typeface="Amiri" pitchFamily="2" charset="-78"/>
                 <a:ea typeface="Amiri" pitchFamily="2" charset="-78"/>
                 <a:cs typeface="Amiri" pitchFamily="2" charset="-78"/>
               </a:rPr>
@@ -3914,7 +3914,7 @@
                 <a:solidFill>
                   <a:srgbClr val="FFFFFF"/>
                 </a:solidFill>
-                <a:latin typeface="Calibri" pitchFamily="34" charset="0"/>
+                <a:latin typeface="Amiri" pitchFamily="2" charset="-78"/>
                 <a:ea typeface="Amiri" pitchFamily="2" charset="-78"/>
                 <a:cs typeface="Amiri" pitchFamily="2" charset="-78"/>
               </a:rPr>
@@ -3980,7 +3980,7 @@
                 <a:solidFill>
                   <a:srgbClr val="FFFFFF"/>
                 </a:solidFill>
-                <a:latin typeface="Calibri" pitchFamily="34" charset="0"/>
+                <a:latin typeface="Amiri" pitchFamily="2" charset="-78"/>
                 <a:ea typeface="Amiri" pitchFamily="2" charset="-78"/>
                 <a:cs typeface="Amiri" pitchFamily="2" charset="-78"/>
               </a:rPr>
@@ -4046,7 +4046,7 @@
                 <a:solidFill>
                   <a:srgbClr val="FFFFFF"/>
                 </a:solidFill>
-                <a:latin typeface="Calibri" pitchFamily="34" charset="0"/>
+                <a:latin typeface="Amiri" pitchFamily="2" charset="-78"/>
                 <a:ea typeface="Amiri" pitchFamily="2" charset="-78"/>
                 <a:cs typeface="Amiri" pitchFamily="2" charset="-78"/>
               </a:rPr>
@@ -4844,7 +4844,7 @@
                 <a:solidFill>
                   <a:srgbClr val="FFFFFF"/>
                 </a:solidFill>
-                <a:latin typeface="Calibri" pitchFamily="34" charset="0"/>
+                <a:latin typeface="Amiri" pitchFamily="2" charset="-78"/>
                 <a:ea typeface="Amiri" pitchFamily="2" charset="-78"/>
                 <a:cs typeface="Amiri" pitchFamily="2" charset="-78"/>
               </a:rPr>
@@ -4910,7 +4910,7 @@
                 <a:solidFill>
                   <a:srgbClr val="FFFFFF"/>
                 </a:solidFill>
-                <a:latin typeface="Calibri" pitchFamily="34" charset="0"/>
+                <a:latin typeface="Amiri" pitchFamily="2" charset="-78"/>
                 <a:ea typeface="Amiri" pitchFamily="2" charset="-78"/>
                 <a:cs typeface="Amiri" pitchFamily="2" charset="-78"/>
               </a:rPr>
@@ -4976,7 +4976,7 @@
                 <a:solidFill>
                   <a:srgbClr val="FFFFFF"/>
                 </a:solidFill>
-                <a:latin typeface="Calibri" pitchFamily="34" charset="0"/>
+                <a:latin typeface="Amiri" pitchFamily="2" charset="-78"/>
                 <a:ea typeface="Amiri" pitchFamily="2" charset="-78"/>
                 <a:cs typeface="Amiri" pitchFamily="2" charset="-78"/>
               </a:rPr>
@@ -5042,7 +5042,7 @@
                 <a:solidFill>
                   <a:srgbClr val="FFFFFF"/>
                 </a:solidFill>
-                <a:latin typeface="Calibri" pitchFamily="34" charset="0"/>
+                <a:latin typeface="Amiri" pitchFamily="2" charset="-78"/>
                 <a:ea typeface="Amiri" pitchFamily="2" charset="-78"/>
                 <a:cs typeface="Amiri" pitchFamily="2" charset="-78"/>
               </a:rPr>
@@ -8599,7 +8599,7 @@
                 <a:solidFill>
                   <a:srgbClr val="FFFFFF"/>
                 </a:solidFill>
-                <a:latin typeface="Calibri" pitchFamily="34" charset="0"/>
+                <a:latin typeface="Amiri" pitchFamily="2" charset="-78"/>
                 <a:ea typeface="Amiri" pitchFamily="2" charset="-78"/>
                 <a:cs typeface="Amiri" pitchFamily="2" charset="-78"/>
               </a:rPr>
@@ -8665,7 +8665,7 @@
                 <a:solidFill>
                   <a:srgbClr val="FFFFFF"/>
                 </a:solidFill>
-                <a:latin typeface="Calibri" pitchFamily="34" charset="0"/>
+                <a:latin typeface="Amiri" pitchFamily="2" charset="-78"/>
                 <a:ea typeface="Amiri" pitchFamily="2" charset="-78"/>
                 <a:cs typeface="Amiri" pitchFamily="2" charset="-78"/>
               </a:rPr>
@@ -8731,7 +8731,7 @@
                 <a:solidFill>
                   <a:srgbClr val="FFFFFF"/>
                 </a:solidFill>
-                <a:latin typeface="Calibri" pitchFamily="34" charset="0"/>
+                <a:latin typeface="Amiri" pitchFamily="2" charset="-78"/>
                 <a:ea typeface="Amiri" pitchFamily="2" charset="-78"/>
                 <a:cs typeface="Amiri" pitchFamily="2" charset="-78"/>
               </a:rPr>
@@ -8797,7 +8797,7 @@
                 <a:solidFill>
                   <a:srgbClr val="FFFFFF"/>
                 </a:solidFill>
-                <a:latin typeface="Calibri" pitchFamily="34" charset="0"/>
+                <a:latin typeface="Amiri" pitchFamily="2" charset="-78"/>
                 <a:ea typeface="Amiri" pitchFamily="2" charset="-78"/>
                 <a:cs typeface="Amiri" pitchFamily="2" charset="-78"/>
               </a:rPr>
@@ -9584,7 +9584,7 @@
                 <a:solidFill>
                   <a:srgbClr val="FFFFFF"/>
                 </a:solidFill>
-                <a:latin typeface="Calibri" pitchFamily="34" charset="0"/>
+                <a:latin typeface="Amiri" pitchFamily="2" charset="-78"/>
                 <a:ea typeface="Amiri" pitchFamily="2" charset="-78"/>
                 <a:cs typeface="Amiri" pitchFamily="2" charset="-78"/>
               </a:rPr>
@@ -9650,7 +9650,7 @@
                 <a:solidFill>
                   <a:srgbClr val="FFFFFF"/>
                 </a:solidFill>
-                <a:latin typeface="Calibri" pitchFamily="34" charset="0"/>
+                <a:latin typeface="Amiri" pitchFamily="2" charset="-78"/>
                 <a:ea typeface="Amiri" pitchFamily="2" charset="-78"/>
                 <a:cs typeface="Amiri" pitchFamily="2" charset="-78"/>
               </a:rPr>
@@ -9716,7 +9716,7 @@
                 <a:solidFill>
                   <a:srgbClr val="FFFFFF"/>
                 </a:solidFill>
-                <a:latin typeface="Calibri" pitchFamily="34" charset="0"/>
+                <a:latin typeface="Amiri" pitchFamily="2" charset="-78"/>
                 <a:ea typeface="Amiri" pitchFamily="2" charset="-78"/>
                 <a:cs typeface="Amiri" pitchFamily="2" charset="-78"/>
               </a:rPr>
@@ -9782,7 +9782,7 @@
                 <a:solidFill>
                   <a:srgbClr val="FFFFFF"/>
                 </a:solidFill>
-                <a:latin typeface="Calibri" pitchFamily="34" charset="0"/>
+                <a:latin typeface="Amiri" pitchFamily="2" charset="-78"/>
                 <a:ea typeface="Amiri" pitchFamily="2" charset="-78"/>
                 <a:cs typeface="Amiri" pitchFamily="2" charset="-78"/>
               </a:rPr>
@@ -10569,7 +10569,7 @@
                 <a:solidFill>
                   <a:srgbClr val="FFFFFF"/>
                 </a:solidFill>
-                <a:latin typeface="Calibri" pitchFamily="34" charset="0"/>
+                <a:latin typeface="Amiri" pitchFamily="2" charset="-78"/>
                 <a:ea typeface="Amiri" pitchFamily="2" charset="-78"/>
                 <a:cs typeface="Amiri" pitchFamily="2" charset="-78"/>
               </a:rPr>
@@ -10635,7 +10635,7 @@
                 <a:solidFill>
                   <a:srgbClr val="FFFFFF"/>
                 </a:solidFill>
-                <a:latin typeface="Calibri" pitchFamily="34" charset="0"/>
+                <a:latin typeface="Amiri" pitchFamily="2" charset="-78"/>
                 <a:ea typeface="Amiri" pitchFamily="2" charset="-78"/>
                 <a:cs typeface="Amiri" pitchFamily="2" charset="-78"/>
               </a:rPr>
@@ -10701,7 +10701,7 @@
                 <a:solidFill>
                   <a:srgbClr val="FFFFFF"/>
                 </a:solidFill>
-                <a:latin typeface="Calibri" pitchFamily="34" charset="0"/>
+                <a:latin typeface="Amiri" pitchFamily="2" charset="-78"/>
                 <a:ea typeface="Amiri" pitchFamily="2" charset="-78"/>
                 <a:cs typeface="Amiri" pitchFamily="2" charset="-78"/>
               </a:rPr>
@@ -10767,7 +10767,7 @@
                 <a:solidFill>
                   <a:srgbClr val="FFFFFF"/>
                 </a:solidFill>
-                <a:latin typeface="Calibri" pitchFamily="34" charset="0"/>
+                <a:latin typeface="Amiri" pitchFamily="2" charset="-78"/>
                 <a:ea typeface="Amiri" pitchFamily="2" charset="-78"/>
                 <a:cs typeface="Amiri" pitchFamily="2" charset="-78"/>
               </a:rPr>
